--- a/public/fun/pack/pptx/talkpro/발표템플릿프리미엄_18_업무보고_아쿠아스틸.pptx
+++ b/public/fun/pack/pptx/talkpro/발표템플릿프리미엄_18_업무보고_아쿠아스틸.pptx
@@ -115,12 +115,12 @@
   <p:extLst>
     <p:ext uri="{521415D9-36F7-43E2-AB2F-B90AF26B5E84}">
       <p14:sectionLst xmlns:p14="http://schemas.microsoft.com/office/powerpoint/2010/main">
-        <p14:section name="시작" id="{E757E439-370B-4B26-AF3E-C469BABD431B}">
+        <p14:section name="시작" id="{6DDFEDE5-8E0A-4F7B-8A90-4FCBF89187F4}">
           <p14:sldIdLst>
             <p14:sldId id="256"/>
           </p14:sldIdLst>
         </p14:section>
-        <p14:section name="본문" id="{6A2CAB6E-9C96-49B9-BB4F-CA0BDAD0BD2C}">
+        <p14:section name="본문" id="{2EEBD606-6EFD-4504-B2B3-CA4784BA7821}">
           <p14:sldIdLst>
             <p14:sldId id="257"/>
             <p14:sldId id="258"/>
@@ -131,7 +131,7 @@
             <p14:sldId id="263"/>
           </p14:sldIdLst>
         </p14:section>
-        <p14:section name="마무리" id="{9349C632-B92F-491F-A211-9102AE1EC7A9}">
+        <p14:section name="마무리" id="{4C67368C-5FDA-4822-8431-4197C640D18F}">
           <p14:sldIdLst>
             <p14:sldId id="264"/>
           </p14:sldIdLst>
@@ -3220,7 +3220,7 @@
             </a:lvl1pPr>
           </a:lstStyle>
           <a:p>
-            <a:fld id="{DD01976A-01D6-41BE-ABD0-6C441D1659B4}" type="slidenum">
+            <a:fld id="{09BF94E9-9DBC-450F-B91B-3F3F6F0744BA}" type="slidenum">
               <a:rPr lang="en-US"/>
               <a:t>‹#›</a:t>
             </a:fld>
@@ -5280,7 +5280,7 @@
             </a:lvl1pPr>
           </a:lstStyle>
           <a:p>
-            <a:fld id="{E4B81DA5-24BF-4797-8B68-28300A11380E}" type="slidenum">
+            <a:fld id="{C8C7B984-BDDC-4B2C-9B0E-D6908DFAB64C}" type="slidenum">
               <a:rPr lang="en-US"/>
               <a:t>‹#›</a:t>
             </a:fld>
@@ -6032,7 +6032,7 @@
             </a:lvl1pPr>
           </a:lstStyle>
           <a:p>
-            <a:fld id="{0EDA7034-2095-4E07-9CDF-B8A49AE0BD84}" type="slidenum">
+            <a:fld id="{388D1107-F465-471D-B71F-29D98AB06098}" type="slidenum">
               <a:rPr lang="en-US"/>
               <a:t>‹#›</a:t>
             </a:fld>
@@ -6923,7 +6923,7 @@
           <a:p>
             <a:r>
               <a:rPr lang="ko-KR"/>
-              <a:t>0000. 00. 00</a:t>
+              <a:t>날짜 입력</a:t>
             </a:r>
           </a:p>
         </p:txBody>
@@ -7030,7 +7030,7 @@
           <a:bodyPr/>
           <a:lstStyle/>
           <a:p>
-            <a:fld id="{9680B485-B87B-40C4-9DAA-7987EB8F2810}" type="slidenum">
+            <a:fld id="{CFA20DDC-6BB5-4DE4-A65E-D5E060E7B022}" type="slidenum">
               <a:rPr lang="en-US"/>
               <a:t>‹#›</a:t>
             </a:fld>
@@ -8318,7 +8318,7 @@
           <a:bodyPr/>
           <a:lstStyle/>
           <a:p>
-            <a:fld id="{A689934C-5B23-4492-9632-6AAF94E4F1B0}" type="slidenum">
+            <a:fld id="{B35D04FC-E3A0-48BA-AE5B-4F2D678467A9}" type="slidenum">
               <a:rPr lang="en-US"/>
               <a:t>‹#›</a:t>
             </a:fld>
@@ -8428,7 +8428,7 @@
           <a:bodyPr/>
           <a:lstStyle/>
           <a:p>
-            <a:fld id="{D455320E-19B6-4145-A526-A187C787830C}" type="slidenum">
+            <a:fld id="{26A83446-FFD5-4E1E-A635-465A0335FE12}" type="slidenum">
               <a:rPr lang="en-US"/>
               <a:t>‹#›</a:t>
             </a:fld>
@@ -9471,7 +9471,7 @@
           <a:bodyPr/>
           <a:lstStyle/>
           <a:p>
-            <a:fld id="{A4AB5504-A32A-48F2-A84E-34549BB3F8DF}" type="slidenum">
+            <a:fld id="{1F1C954E-6A54-42CA-B07A-44A88F3B516F}" type="slidenum">
               <a:rPr lang="en-US"/>
               <a:t>‹#›</a:t>
             </a:fld>
@@ -10141,7 +10141,7 @@
           <a:bodyPr/>
           <a:lstStyle/>
           <a:p>
-            <a:fld id="{CED5CC73-9D54-472C-B438-AE7DCFF2A25C}" type="slidenum">
+            <a:fld id="{0D9A38A4-76FD-4669-B26D-9C15CE5119DE}" type="slidenum">
               <a:rPr lang="en-US"/>
               <a:t>‹#›</a:t>
             </a:fld>
@@ -10346,7 +10346,7 @@
           <a:bodyPr/>
           <a:lstStyle/>
           <a:p>
-            <a:fld id="{83A1B078-6A18-40F7-8416-3E33FD322ABF}" type="slidenum">
+            <a:fld id="{1A329CB8-D00A-4F3B-B8EF-3CB28637E69D}" type="slidenum">
               <a:rPr lang="en-US"/>
               <a:t>‹#›</a:t>
             </a:fld>
@@ -11432,7 +11432,7 @@
           <a:bodyPr/>
           <a:lstStyle/>
           <a:p>
-            <a:fld id="{A8EBE605-9143-4839-9C04-3881E3033D0E}" type="slidenum">
+            <a:fld id="{6BD1EE7C-8E30-4147-AB56-A5E3FC9D8EBD}" type="slidenum">
               <a:rPr lang="en-US"/>
               <a:t>‹#›</a:t>
             </a:fld>
